--- a/present/ripwire-showcase.pptx
+++ b/present/ripwire-showcase.pptx
@@ -26038,7 +26038,7 @@
                 <a:ea typeface="Arial" pitchFamily="34" charset="-122"/>
                 <a:cs typeface="Arial" pitchFamily="34" charset="-120"/>
               </a:rPr>
-              <a:t>658 gate scripts</a:t>
+              <a:t>660 gate scripts</a:t>
             </a:r>
             <a:endParaRPr lang="en-US" sz="1450" dirty="0"/>
           </a:p>
@@ -26778,7 +26778,7 @@
                 <a:ea typeface="Arial" pitchFamily="34" charset="-122"/>
                 <a:cs typeface="Arial" pitchFamily="34" charset="-120"/>
               </a:rPr>
-              <a:t>658</a:t>
+              <a:t>660</a:t>
             </a:r>
             <a:endParaRPr lang="en-US" sz="4200" dirty="0"/>
           </a:p>
@@ -35203,7 +35203,7 @@
                 <a:ea typeface="Arial" pitchFamily="34" charset="-122"/>
                 <a:cs typeface="Arial" pitchFamily="34" charset="-120"/>
               </a:rPr>
-              <a:t>658 gate scripts</a:t>
+              <a:t>660 gate scripts</a:t>
             </a:r>
             <a:endParaRPr lang="en-US" sz="1200" dirty="0"/>
           </a:p>

--- a/present/ripwire-showcase.pptx
+++ b/present/ripwire-showcase.pptx
@@ -26038,7 +26038,7 @@
                 <a:ea typeface="Arial" pitchFamily="34" charset="-122"/>
                 <a:cs typeface="Arial" pitchFamily="34" charset="-120"/>
               </a:rPr>
-              <a:t>660 gate scripts</a:t>
+              <a:t>664 gate scripts</a:t>
             </a:r>
             <a:endParaRPr lang="en-US" sz="1450" dirty="0"/>
           </a:p>
@@ -26778,7 +26778,7 @@
                 <a:ea typeface="Arial" pitchFamily="34" charset="-122"/>
                 <a:cs typeface="Arial" pitchFamily="34" charset="-120"/>
               </a:rPr>
-              <a:t>660</a:t>
+              <a:t>664</a:t>
             </a:r>
             <a:endParaRPr lang="en-US" sz="4200" dirty="0"/>
           </a:p>
@@ -35203,7 +35203,7 @@
                 <a:ea typeface="Arial" pitchFamily="34" charset="-122"/>
                 <a:cs typeface="Arial" pitchFamily="34" charset="-120"/>
               </a:rPr>
-              <a:t>660 gate scripts</a:t>
+              <a:t>664 gate scripts</a:t>
             </a:r>
             <a:endParaRPr lang="en-US" sz="1200" dirty="0"/>
           </a:p>

--- a/present/ripwire-showcase.pptx
+++ b/present/ripwire-showcase.pptx
@@ -26038,7 +26038,7 @@
                 <a:ea typeface="Arial" pitchFamily="34" charset="-122"/>
                 <a:cs typeface="Arial" pitchFamily="34" charset="-120"/>
               </a:rPr>
-              <a:t>664 gate scripts</a:t>
+              <a:t>658 gate scripts</a:t>
             </a:r>
             <a:endParaRPr lang="en-US" sz="1450" dirty="0"/>
           </a:p>
@@ -26778,7 +26778,7 @@
                 <a:ea typeface="Arial" pitchFamily="34" charset="-122"/>
                 <a:cs typeface="Arial" pitchFamily="34" charset="-120"/>
               </a:rPr>
-              <a:t>664</a:t>
+              <a:t>658</a:t>
             </a:r>
             <a:endParaRPr lang="en-US" sz="4200" dirty="0"/>
           </a:p>
@@ -35203,7 +35203,7 @@
                 <a:ea typeface="Arial" pitchFamily="34" charset="-122"/>
                 <a:cs typeface="Arial" pitchFamily="34" charset="-120"/>
               </a:rPr>
-              <a:t>664 gate scripts</a:t>
+              <a:t>658 gate scripts</a:t>
             </a:r>
             <a:endParaRPr lang="en-US" sz="1200" dirty="0"/>
           </a:p>
